--- a/Reporte 240326.pptx
+++ b/Reporte 240326.pptx
@@ -6842,10 +6842,10 @@
       </p:sp>
       <p:pic>
         <p:nvPicPr>
-          <p:cNvPr id="6" name="Imagen 5">
+          <p:cNvPr id="5" name="Imagen 4">
             <a:extLst>
               <a:ext uri="{FF2B5EF4-FFF2-40B4-BE49-F238E27FC236}">
-                <a16:creationId xmlns:a16="http://schemas.microsoft.com/office/drawing/2014/main" id="{958EFDC3-CA6A-B276-A7F9-ED9F144E076C}"/>
+                <a16:creationId xmlns:a16="http://schemas.microsoft.com/office/drawing/2014/main" id="{BCFF16A3-39C7-9225-EC51-DB60697DA3D8}"/>
               </a:ext>
             </a:extLst>
           </p:cNvPr>
@@ -6862,8 +6862,8 @@
         </p:blipFill>
         <p:spPr>
           <a:xfrm>
-            <a:off x="0" y="437165"/>
-            <a:ext cx="9144000" cy="4269170"/>
+            <a:off x="0" y="448157"/>
+            <a:ext cx="9144000" cy="4247186"/>
           </a:xfrm>
           <a:prstGeom prst="rect">
             <a:avLst/>
@@ -6950,10 +6950,10 @@
       </p:sp>
       <p:pic>
         <p:nvPicPr>
-          <p:cNvPr id="6" name="Imagen 5">
+          <p:cNvPr id="3" name="Imagen 2">
             <a:extLst>
               <a:ext uri="{FF2B5EF4-FFF2-40B4-BE49-F238E27FC236}">
-                <a16:creationId xmlns:a16="http://schemas.microsoft.com/office/drawing/2014/main" id="{EB9A9BFA-2F47-B288-5E75-25A884BB7944}"/>
+                <a16:creationId xmlns:a16="http://schemas.microsoft.com/office/drawing/2014/main" id="{A757CA36-DBD0-7356-FFE9-6B0FBFF3DD39}"/>
               </a:ext>
             </a:extLst>
           </p:cNvPr>
@@ -6970,8 +6970,8 @@
         </p:blipFill>
         <p:spPr>
           <a:xfrm>
-            <a:off x="0" y="1046101"/>
-            <a:ext cx="9144000" cy="3051297"/>
+            <a:off x="0" y="1021961"/>
+            <a:ext cx="9144000" cy="3099577"/>
           </a:xfrm>
           <a:prstGeom prst="rect">
             <a:avLst/>
